--- a/Lessons/Lesson B2-4 - Loops.pptx
+++ b/Lessons/Lesson B2-4 - Loops.pptx
@@ -146,18 +146,18 @@
   <pc:docChgLst>
     <pc:chgData name="Michael Hill" userId="41dba03d-e58d-4389-9894-554c10310ba4" providerId="ADAL" clId="{5A184EEC-996A-44E9-99A4-F6031595A74F}"/>
     <pc:docChg chg="undo custSel addSld delSld modSld sldOrd">
-      <pc:chgData name="Michael Hill" userId="41dba03d-e58d-4389-9894-554c10310ba4" providerId="ADAL" clId="{5A184EEC-996A-44E9-99A4-F6031595A74F}" dt="2025-08-14T18:11:32.621" v="4431"/>
+      <pc:chgData name="Michael Hill" userId="41dba03d-e58d-4389-9894-554c10310ba4" providerId="ADAL" clId="{5A184EEC-996A-44E9-99A4-F6031595A74F}" dt="2025-08-15T14:35:39.691" v="4564" actId="20577"/>
       <pc:docMkLst>
         <pc:docMk/>
       </pc:docMkLst>
       <pc:sldChg chg="modSp mod modAnim">
-        <pc:chgData name="Michael Hill" userId="41dba03d-e58d-4389-9894-554c10310ba4" providerId="ADAL" clId="{5A184EEC-996A-44E9-99A4-F6031595A74F}" dt="2025-08-14T18:11:11.118" v="4427"/>
+        <pc:chgData name="Michael Hill" userId="41dba03d-e58d-4389-9894-554c10310ba4" providerId="ADAL" clId="{5A184EEC-996A-44E9-99A4-F6031595A74F}" dt="2025-08-15T14:29:43.493" v="4447" actId="20577"/>
         <pc:sldMkLst>
           <pc:docMk/>
           <pc:sldMk cId="1878848435" sldId="256"/>
         </pc:sldMkLst>
         <pc:spChg chg="mod">
-          <ac:chgData name="Michael Hill" userId="41dba03d-e58d-4389-9894-554c10310ba4" providerId="ADAL" clId="{5A184EEC-996A-44E9-99A4-F6031595A74F}" dt="2025-08-12T13:11:38.823" v="0" actId="20577"/>
+          <ac:chgData name="Michael Hill" userId="41dba03d-e58d-4389-9894-554c10310ba4" providerId="ADAL" clId="{5A184EEC-996A-44E9-99A4-F6031595A74F}" dt="2025-08-15T14:29:43.493" v="4447" actId="20577"/>
           <ac:spMkLst>
             <pc:docMk/>
             <pc:sldMk cId="1878848435" sldId="256"/>
@@ -165,7 +165,7 @@
           </ac:spMkLst>
         </pc:spChg>
         <pc:spChg chg="mod">
-          <ac:chgData name="Michael Hill" userId="41dba03d-e58d-4389-9894-554c10310ba4" providerId="ADAL" clId="{5A184EEC-996A-44E9-99A4-F6031595A74F}" dt="2025-08-12T13:11:51.190" v="10" actId="1076"/>
+          <ac:chgData name="Michael Hill" userId="41dba03d-e58d-4389-9894-554c10310ba4" providerId="ADAL" clId="{5A184EEC-996A-44E9-99A4-F6031595A74F}" dt="2025-08-15T14:29:42.555" v="4445" actId="20577"/>
           <ac:spMkLst>
             <pc:docMk/>
             <pc:sldMk cId="1878848435" sldId="256"/>
@@ -243,7 +243,7 @@
         </pc:spChg>
       </pc:sldChg>
       <pc:sldChg chg="modSp mod">
-        <pc:chgData name="Michael Hill" userId="41dba03d-e58d-4389-9894-554c10310ba4" providerId="ADAL" clId="{5A184EEC-996A-44E9-99A4-F6031595A74F}" dt="2025-08-13T13:33:31.759" v="4425" actId="1076"/>
+        <pc:chgData name="Michael Hill" userId="41dba03d-e58d-4389-9894-554c10310ba4" providerId="ADAL" clId="{5A184EEC-996A-44E9-99A4-F6031595A74F}" dt="2025-08-15T14:35:39.691" v="4564" actId="20577"/>
         <pc:sldMkLst>
           <pc:docMk/>
           <pc:sldMk cId="510623671" sldId="276"/>
@@ -254,6 +254,14 @@
             <pc:docMk/>
             <pc:sldMk cId="510623671" sldId="276"/>
             <ac:spMk id="5" creationId="{7A51E191-FB80-DD01-12DA-A63D6699BDF7}"/>
+          </ac:spMkLst>
+        </pc:spChg>
+        <pc:spChg chg="mod">
+          <ac:chgData name="Michael Hill" userId="41dba03d-e58d-4389-9894-554c10310ba4" providerId="ADAL" clId="{5A184EEC-996A-44E9-99A4-F6031595A74F}" dt="2025-08-15T14:35:39.691" v="4564" actId="20577"/>
+          <ac:spMkLst>
+            <pc:docMk/>
+            <pc:sldMk cId="510623671" sldId="276"/>
+            <ac:spMk id="8" creationId="{0D1FA388-F44C-0D62-E127-5DAA237B2FBA}"/>
           </ac:spMkLst>
         </pc:spChg>
       </pc:sldChg>
@@ -896,7 +904,7 @@
           <a:p>
             <a:fld id="{52CFA067-BC5A-4095-A3A5-99A1BAFE9208}" type="datetimeFigureOut">
               <a:rPr lang="en-US" smtClean="0"/>
-              <a:t>8/14/2025</a:t>
+              <a:t>8/15/2025</a:t>
             </a:fld>
             <a:endParaRPr lang="en-US"/>
           </a:p>
@@ -1094,7 +1102,7 @@
           <a:p>
             <a:fld id="{52CFA067-BC5A-4095-A3A5-99A1BAFE9208}" type="datetimeFigureOut">
               <a:rPr lang="en-US" smtClean="0"/>
-              <a:t>8/14/2025</a:t>
+              <a:t>8/15/2025</a:t>
             </a:fld>
             <a:endParaRPr lang="en-US"/>
           </a:p>
@@ -1302,7 +1310,7 @@
           <a:p>
             <a:fld id="{52CFA067-BC5A-4095-A3A5-99A1BAFE9208}" type="datetimeFigureOut">
               <a:rPr lang="en-US" smtClean="0"/>
-              <a:t>8/14/2025</a:t>
+              <a:t>8/15/2025</a:t>
             </a:fld>
             <a:endParaRPr lang="en-US"/>
           </a:p>
@@ -1500,7 +1508,7 @@
           <a:p>
             <a:fld id="{52CFA067-BC5A-4095-A3A5-99A1BAFE9208}" type="datetimeFigureOut">
               <a:rPr lang="en-US" smtClean="0"/>
-              <a:t>8/14/2025</a:t>
+              <a:t>8/15/2025</a:t>
             </a:fld>
             <a:endParaRPr lang="en-US"/>
           </a:p>
@@ -1775,7 +1783,7 @@
           <a:p>
             <a:fld id="{52CFA067-BC5A-4095-A3A5-99A1BAFE9208}" type="datetimeFigureOut">
               <a:rPr lang="en-US" smtClean="0"/>
-              <a:t>8/14/2025</a:t>
+              <a:t>8/15/2025</a:t>
             </a:fld>
             <a:endParaRPr lang="en-US"/>
           </a:p>
@@ -2040,7 +2048,7 @@
           <a:p>
             <a:fld id="{52CFA067-BC5A-4095-A3A5-99A1BAFE9208}" type="datetimeFigureOut">
               <a:rPr lang="en-US" smtClean="0"/>
-              <a:t>8/14/2025</a:t>
+              <a:t>8/15/2025</a:t>
             </a:fld>
             <a:endParaRPr lang="en-US"/>
           </a:p>
@@ -2452,7 +2460,7 @@
           <a:p>
             <a:fld id="{52CFA067-BC5A-4095-A3A5-99A1BAFE9208}" type="datetimeFigureOut">
               <a:rPr lang="en-US" smtClean="0"/>
-              <a:t>8/14/2025</a:t>
+              <a:t>8/15/2025</a:t>
             </a:fld>
             <a:endParaRPr lang="en-US"/>
           </a:p>
@@ -2593,7 +2601,7 @@
           <a:p>
             <a:fld id="{52CFA067-BC5A-4095-A3A5-99A1BAFE9208}" type="datetimeFigureOut">
               <a:rPr lang="en-US" smtClean="0"/>
-              <a:t>8/14/2025</a:t>
+              <a:t>8/15/2025</a:t>
             </a:fld>
             <a:endParaRPr lang="en-US"/>
           </a:p>
@@ -2706,7 +2714,7 @@
           <a:p>
             <a:fld id="{52CFA067-BC5A-4095-A3A5-99A1BAFE9208}" type="datetimeFigureOut">
               <a:rPr lang="en-US" smtClean="0"/>
-              <a:t>8/14/2025</a:t>
+              <a:t>8/15/2025</a:t>
             </a:fld>
             <a:endParaRPr lang="en-US"/>
           </a:p>
@@ -3017,7 +3025,7 @@
           <a:p>
             <a:fld id="{52CFA067-BC5A-4095-A3A5-99A1BAFE9208}" type="datetimeFigureOut">
               <a:rPr lang="en-US" smtClean="0"/>
-              <a:t>8/14/2025</a:t>
+              <a:t>8/15/2025</a:t>
             </a:fld>
             <a:endParaRPr lang="en-US"/>
           </a:p>
@@ -3305,7 +3313,7 @@
           <a:p>
             <a:fld id="{52CFA067-BC5A-4095-A3A5-99A1BAFE9208}" type="datetimeFigureOut">
               <a:rPr lang="en-US" smtClean="0"/>
-              <a:t>8/14/2025</a:t>
+              <a:t>8/15/2025</a:t>
             </a:fld>
             <a:endParaRPr lang="en-US"/>
           </a:p>
@@ -3546,7 +3554,7 @@
           <a:p>
             <a:fld id="{52CFA067-BC5A-4095-A3A5-99A1BAFE9208}" type="datetimeFigureOut">
               <a:rPr lang="en-US" smtClean="0"/>
-              <a:t>8/14/2025</a:t>
+              <a:t>8/15/2025</a:t>
             </a:fld>
             <a:endParaRPr lang="en-US"/>
           </a:p>
@@ -15390,17 +15398,17 @@
                 </a:solidFill>
                 <a:latin typeface="Bahnschrift" panose="020B0502040204020203" pitchFamily="34" charset="0"/>
               </a:rPr>
-              <a:t>Problem 1: Write a program that asks the user for a number and a Boolean variable. If the Boolean is true, output double the number. If it is false, output the square of the number.</a:t>
-            </a:r>
-          </a:p>
-          <a:p>
-            <a:pPr marL="457200" indent="-457200">
-              <a:spcBef>
-                <a:spcPts val="1200"/>
-              </a:spcBef>
-              <a:buFont typeface="Arial" panose="020B0604020202020204" pitchFamily="34" charset="0"/>
-              <a:buChar char="•"/>
-            </a:pPr>
+              <a:t>You can find today’s programming assignment </a:t>
+            </a:r>
+            <a:r>
+              <a:rPr lang="en-US" sz="2800">
+                <a:solidFill>
+                  <a:schemeClr val="bg1"/>
+                </a:solidFill>
+                <a:latin typeface="Bahnschrift" panose="020B0502040204020203" pitchFamily="34" charset="0"/>
+              </a:rPr>
+              <a:t>(PA B2-1) on </a:t>
+            </a:r>
             <a:r>
               <a:rPr lang="en-US" sz="2800" dirty="0">
                 <a:solidFill>
@@ -15408,17 +15416,17 @@
                 </a:solidFill>
                 <a:latin typeface="Bahnschrift" panose="020B0502040204020203" pitchFamily="34" charset="0"/>
               </a:rPr>
-              <a:t>Problem 2: Assume the retirement age for men is 65 and women is 62. Write a program that asks the user’s age and gender to determine if they are eligible for retirement. If not, tell them how many more years they have.</a:t>
-            </a:r>
-          </a:p>
-          <a:p>
-            <a:pPr marL="457200" indent="-457200">
-              <a:spcBef>
-                <a:spcPts val="1200"/>
-              </a:spcBef>
-              <a:buFont typeface="Arial" panose="020B0604020202020204" pitchFamily="34" charset="0"/>
-              <a:buChar char="•"/>
-            </a:pPr>
+              <a:t>the class </a:t>
+            </a:r>
+            <a:r>
+              <a:rPr lang="en-US" sz="2800" dirty="0" err="1">
+                <a:solidFill>
+                  <a:schemeClr val="bg1"/>
+                </a:solidFill>
+                <a:latin typeface="Bahnschrift" panose="020B0502040204020203" pitchFamily="34" charset="0"/>
+              </a:rPr>
+              <a:t>Github</a:t>
+            </a:r>
             <a:r>
               <a:rPr lang="en-US" sz="2800" dirty="0">
                 <a:solidFill>
@@ -15426,7 +15434,7 @@
                 </a:solidFill>
                 <a:latin typeface="Bahnschrift" panose="020B0502040204020203" pitchFamily="34" charset="0"/>
               </a:rPr>
-              <a:t>Problem 3: Write a program to ask the user for two numbers and then output the larger of the two. Tell the user also if they are equal</a:t>
+              <a:t> Repository</a:t>
             </a:r>
           </a:p>
         </p:txBody>
